--- a/courses/development-and-application-of-computer-hardware-accelerators/homework/03_control_flow_execution_model_gallium_arsenide_implementation_technology/presentation/03_control_flow_execution_model_gallium_arsenide_implementation_technology.pptx
+++ b/courses/development-and-application-of-computer-hardware-accelerators/homework/03_control_flow_execution_model_gallium_arsenide_implementation_technology/presentation/03_control_flow_execution_model_gallium_arsenide_implementation_technology.pptx
@@ -124,6 +124,7 @@
 <file path=ppt/revisionInfo.xml><?xml version="1.0" encoding="utf-8"?>
 <p1510:revInfo xmlns:a="http://schemas.openxmlformats.org/drawingml/2006/main" xmlns:r="http://schemas.openxmlformats.org/officeDocument/2006/relationships" xmlns:p1510="http://schemas.microsoft.com/office/powerpoint/2015/10/main">
   <p1510:revLst>
+    <p1510:client id="{B38D0360-4EBE-D666-2015-A06C42FD62DD}" v="13" dt="2026-05-08T14:53:26.226"/>
     <p1510:client id="{F817D6D9-3DDC-DE22-470A-520EB04E7455}" v="942" dt="2026-05-08T07:33:29.653"/>
   </p1510:revLst>
 </p1510:revInfo>
@@ -211,7 +212,7 @@
           <a:p>
             <a:fld id="{9C421AC4-BF2B-4C9B-A2D2-762949CAC733}" type="datetimeFigureOut">
               <a:rPr lang="sr-Latn-RS" smtClean="0"/>
-              <a:t>7.5.2026.</a:t>
+              <a:t>8.5.2026.</a:t>
             </a:fld>
             <a:endParaRPr lang="sr-Latn-RS"/>
           </a:p>
@@ -628,7 +629,7 @@
           <a:p>
             <a:fld id="{7225E84E-B7B5-4B58-A050-4EA79B1E676F}" type="datetimeFigureOut">
               <a:rPr lang="sr-Latn-RS" smtClean="0"/>
-              <a:t>7.5.2026.</a:t>
+              <a:t>8.5.2026.</a:t>
             </a:fld>
             <a:endParaRPr lang="sr-Latn-RS"/>
           </a:p>
@@ -698,6 +699,7 @@
   <p:clrMapOvr>
     <a:masterClrMapping/>
   </p:clrMapOvr>
+  <p:hf hdr="0" ftr="0" dt="0"/>
 </p:sldLayout>
 </file>
 
@@ -828,7 +830,7 @@
           <a:p>
             <a:fld id="{7225E84E-B7B5-4B58-A050-4EA79B1E676F}" type="datetimeFigureOut">
               <a:rPr lang="sr-Latn-RS" smtClean="0"/>
-              <a:t>7.5.2026.</a:t>
+              <a:t>8.5.2026.</a:t>
             </a:fld>
             <a:endParaRPr lang="sr-Latn-RS"/>
           </a:p>
@@ -898,6 +900,7 @@
   <p:clrMapOvr>
     <a:masterClrMapping/>
   </p:clrMapOvr>
+  <p:hf hdr="0" ftr="0" dt="0"/>
 </p:sldLayout>
 </file>
 
@@ -1038,7 +1041,7 @@
           <a:p>
             <a:fld id="{7225E84E-B7B5-4B58-A050-4EA79B1E676F}" type="datetimeFigureOut">
               <a:rPr lang="sr-Latn-RS" smtClean="0"/>
-              <a:t>7.5.2026.</a:t>
+              <a:t>8.5.2026.</a:t>
             </a:fld>
             <a:endParaRPr lang="sr-Latn-RS"/>
           </a:p>
@@ -1108,6 +1111,7 @@
   <p:clrMapOvr>
     <a:masterClrMapping/>
   </p:clrMapOvr>
+  <p:hf hdr="0" ftr="0" dt="0"/>
 </p:sldLayout>
 </file>
 
@@ -1238,7 +1242,7 @@
           <a:p>
             <a:fld id="{7225E84E-B7B5-4B58-A050-4EA79B1E676F}" type="datetimeFigureOut">
               <a:rPr lang="sr-Latn-RS" smtClean="0"/>
-              <a:t>7.5.2026.</a:t>
+              <a:t>8.5.2026.</a:t>
             </a:fld>
             <a:endParaRPr lang="sr-Latn-RS"/>
           </a:p>
@@ -1308,6 +1312,7 @@
   <p:clrMapOvr>
     <a:masterClrMapping/>
   </p:clrMapOvr>
+  <p:hf hdr="0" ftr="0" dt="0"/>
 </p:sldLayout>
 </file>
 
@@ -1514,7 +1519,7 @@
           <a:p>
             <a:fld id="{7225E84E-B7B5-4B58-A050-4EA79B1E676F}" type="datetimeFigureOut">
               <a:rPr lang="sr-Latn-RS" smtClean="0"/>
-              <a:t>7.5.2026.</a:t>
+              <a:t>8.5.2026.</a:t>
             </a:fld>
             <a:endParaRPr lang="sr-Latn-RS"/>
           </a:p>
@@ -1584,6 +1589,7 @@
   <p:clrMapOvr>
     <a:masterClrMapping/>
   </p:clrMapOvr>
+  <p:hf hdr="0" ftr="0" dt="0"/>
 </p:sldLayout>
 </file>
 
@@ -1782,7 +1788,7 @@
           <a:p>
             <a:fld id="{7225E84E-B7B5-4B58-A050-4EA79B1E676F}" type="datetimeFigureOut">
               <a:rPr lang="sr-Latn-RS" smtClean="0"/>
-              <a:t>7.5.2026.</a:t>
+              <a:t>8.5.2026.</a:t>
             </a:fld>
             <a:endParaRPr lang="sr-Latn-RS"/>
           </a:p>
@@ -1852,6 +1858,7 @@
   <p:clrMapOvr>
     <a:masterClrMapping/>
   </p:clrMapOvr>
+  <p:hf hdr="0" ftr="0" dt="0"/>
 </p:sldLayout>
 </file>
 
@@ -2197,7 +2204,7 @@
           <a:p>
             <a:fld id="{7225E84E-B7B5-4B58-A050-4EA79B1E676F}" type="datetimeFigureOut">
               <a:rPr lang="sr-Latn-RS" smtClean="0"/>
-              <a:t>7.5.2026.</a:t>
+              <a:t>8.5.2026.</a:t>
             </a:fld>
             <a:endParaRPr lang="sr-Latn-RS"/>
           </a:p>
@@ -2267,6 +2274,7 @@
   <p:clrMapOvr>
     <a:masterClrMapping/>
   </p:clrMapOvr>
+  <p:hf hdr="0" ftr="0" dt="0"/>
 </p:sldLayout>
 </file>
 
@@ -2339,7 +2347,7 @@
           <a:p>
             <a:fld id="{7225E84E-B7B5-4B58-A050-4EA79B1E676F}" type="datetimeFigureOut">
               <a:rPr lang="sr-Latn-RS" smtClean="0"/>
-              <a:t>7.5.2026.</a:t>
+              <a:t>8.5.2026.</a:t>
             </a:fld>
             <a:endParaRPr lang="sr-Latn-RS"/>
           </a:p>
@@ -2409,6 +2417,7 @@
   <p:clrMapOvr>
     <a:masterClrMapping/>
   </p:clrMapOvr>
+  <p:hf hdr="0" ftr="0" dt="0"/>
 </p:sldLayout>
 </file>
 
@@ -2452,7 +2461,7 @@
           <a:p>
             <a:fld id="{7225E84E-B7B5-4B58-A050-4EA79B1E676F}" type="datetimeFigureOut">
               <a:rPr lang="sr-Latn-RS" smtClean="0"/>
-              <a:t>7.5.2026.</a:t>
+              <a:t>8.5.2026.</a:t>
             </a:fld>
             <a:endParaRPr lang="sr-Latn-RS"/>
           </a:p>
@@ -2522,6 +2531,7 @@
   <p:clrMapOvr>
     <a:masterClrMapping/>
   </p:clrMapOvr>
+  <p:hf hdr="0" ftr="0" dt="0"/>
 </p:sldLayout>
 </file>
 
@@ -2765,7 +2775,7 @@
           <a:p>
             <a:fld id="{7225E84E-B7B5-4B58-A050-4EA79B1E676F}" type="datetimeFigureOut">
               <a:rPr lang="sr-Latn-RS" smtClean="0"/>
-              <a:t>7.5.2026.</a:t>
+              <a:t>8.5.2026.</a:t>
             </a:fld>
             <a:endParaRPr lang="sr-Latn-RS"/>
           </a:p>
@@ -2835,6 +2845,7 @@
   <p:clrMapOvr>
     <a:masterClrMapping/>
   </p:clrMapOvr>
+  <p:hf hdr="0" ftr="0" dt="0"/>
 </p:sldLayout>
 </file>
 
@@ -3054,7 +3065,7 @@
           <a:p>
             <a:fld id="{7225E84E-B7B5-4B58-A050-4EA79B1E676F}" type="datetimeFigureOut">
               <a:rPr lang="sr-Latn-RS" smtClean="0"/>
-              <a:t>7.5.2026.</a:t>
+              <a:t>8.5.2026.</a:t>
             </a:fld>
             <a:endParaRPr lang="sr-Latn-RS"/>
           </a:p>
@@ -3124,6 +3135,7 @@
   <p:clrMapOvr>
     <a:masterClrMapping/>
   </p:clrMapOvr>
+  <p:hf hdr="0" ftr="0" dt="0"/>
 </p:sldLayout>
 </file>
 
@@ -3297,7 +3309,7 @@
           <a:p>
             <a:fld id="{7225E84E-B7B5-4B58-A050-4EA79B1E676F}" type="datetimeFigureOut">
               <a:rPr lang="sr-Latn-RS" smtClean="0"/>
-              <a:t>7.5.2026.</a:t>
+              <a:t>8.5.2026.</a:t>
             </a:fld>
             <a:endParaRPr lang="sr-Latn-RS"/>
           </a:p>
@@ -3414,6 +3426,7 @@
     <p:sldLayoutId id="2147483658" r:id="rId10"/>
     <p:sldLayoutId id="2147483659" r:id="rId11"/>
   </p:sldLayoutIdLst>
+  <p:hf hdr="0" ftr="0" dt="0"/>
   <p:txStyles>
     <p:titleStyle>
       <a:lvl1pPr algn="l" defTabSz="914400" rtl="0" eaLnBrk="1" latinLnBrk="0" hangingPunct="1">
@@ -4050,6 +4063,39 @@
           </a:p>
         </p:txBody>
       </p:sp>
+      <p:sp>
+        <p:nvSpPr>
+          <p:cNvPr id="2" name="Slide Number Placeholder 1">
+            <a:extLst>
+              <a:ext uri="{FF2B5EF4-FFF2-40B4-BE49-F238E27FC236}">
+                <a16:creationId xmlns:a16="http://schemas.microsoft.com/office/drawing/2014/main" id="{5472E610-70D9-2D73-871A-DBBB43E11B56}"/>
+              </a:ext>
+            </a:extLst>
+          </p:cNvPr>
+          <p:cNvSpPr>
+            <a:spLocks noGrp="1"/>
+          </p:cNvSpPr>
+          <p:nvPr>
+            <p:ph type="sldNum" sz="quarter" idx="12"/>
+          </p:nvPr>
+        </p:nvSpPr>
+        <p:spPr/>
+        <p:txBody>
+          <a:bodyPr/>
+          <a:lstStyle/>
+          <a:p>
+            <a:fld id="{2FD4CC91-F09A-4F5A-BB07-0020C8970CD5}" type="slidenum">
+              <a:rPr lang="sr-Latn-RS" dirty="0" smtClean="0"/>
+              <a:t>1</a:t>
+            </a:fld>
+            <a:r>
+              <a:rPr lang="sr-Latn-RS"/>
+              <a:t>/7</a:t>
+            </a:r>
+            <a:endParaRPr lang="en-US"/>
+          </a:p>
+        </p:txBody>
+      </p:sp>
     </p:spTree>
     <p:extLst>
       <p:ext uri="{BB962C8B-B14F-4D97-AF65-F5344CB8AC3E}">
@@ -4481,6 +4527,39 @@
           </a:p>
         </p:txBody>
       </p:sp>
+      <p:sp>
+        <p:nvSpPr>
+          <p:cNvPr id="4" name="Slide Number Placeholder 3">
+            <a:extLst>
+              <a:ext uri="{FF2B5EF4-FFF2-40B4-BE49-F238E27FC236}">
+                <a16:creationId xmlns:a16="http://schemas.microsoft.com/office/drawing/2014/main" id="{D75F08A9-0BC1-374E-DCF3-635C11F7F3D6}"/>
+              </a:ext>
+            </a:extLst>
+          </p:cNvPr>
+          <p:cNvSpPr>
+            <a:spLocks noGrp="1"/>
+          </p:cNvSpPr>
+          <p:nvPr>
+            <p:ph type="sldNum" sz="quarter" idx="12"/>
+          </p:nvPr>
+        </p:nvSpPr>
+        <p:spPr/>
+        <p:txBody>
+          <a:bodyPr/>
+          <a:lstStyle/>
+          <a:p>
+            <a:fld id="{2FD4CC91-F09A-4F5A-BB07-0020C8970CD5}" type="slidenum">
+              <a:rPr lang="sr-Latn-RS" dirty="0" smtClean="0"/>
+              <a:t>2</a:t>
+            </a:fld>
+            <a:r>
+              <a:rPr lang="sr-Latn-RS"/>
+              <a:t>/7</a:t>
+            </a:r>
+            <a:endParaRPr lang="en-US"/>
+          </a:p>
+        </p:txBody>
+      </p:sp>
     </p:spTree>
     <p:extLst>
       <p:ext uri="{BB962C8B-B14F-4D97-AF65-F5344CB8AC3E}">
@@ -4771,6 +4850,39 @@
           </a:p>
         </p:txBody>
       </p:sp>
+      <p:sp>
+        <p:nvSpPr>
+          <p:cNvPr id="4" name="Slide Number Placeholder 3">
+            <a:extLst>
+              <a:ext uri="{FF2B5EF4-FFF2-40B4-BE49-F238E27FC236}">
+                <a16:creationId xmlns:a16="http://schemas.microsoft.com/office/drawing/2014/main" id="{5DDC3D80-F86C-4423-2139-838334EB5490}"/>
+              </a:ext>
+            </a:extLst>
+          </p:cNvPr>
+          <p:cNvSpPr>
+            <a:spLocks noGrp="1"/>
+          </p:cNvSpPr>
+          <p:nvPr>
+            <p:ph type="sldNum" sz="quarter" idx="12"/>
+          </p:nvPr>
+        </p:nvSpPr>
+        <p:spPr/>
+        <p:txBody>
+          <a:bodyPr/>
+          <a:lstStyle/>
+          <a:p>
+            <a:fld id="{2FD4CC91-F09A-4F5A-BB07-0020C8970CD5}" type="slidenum">
+              <a:rPr lang="sr-Latn-RS" dirty="0" smtClean="0"/>
+              <a:t>3</a:t>
+            </a:fld>
+            <a:r>
+              <a:rPr lang="sr-Latn-RS"/>
+              <a:t>/7</a:t>
+            </a:r>
+            <a:endParaRPr lang="en-US"/>
+          </a:p>
+        </p:txBody>
+      </p:sp>
     </p:spTree>
     <p:extLst>
       <p:ext uri="{BB962C8B-B14F-4D97-AF65-F5344CB8AC3E}">
@@ -5144,6 +5256,39 @@
           </a:p>
         </p:txBody>
       </p:sp>
+      <p:sp>
+        <p:nvSpPr>
+          <p:cNvPr id="4" name="Slide Number Placeholder 3">
+            <a:extLst>
+              <a:ext uri="{FF2B5EF4-FFF2-40B4-BE49-F238E27FC236}">
+                <a16:creationId xmlns:a16="http://schemas.microsoft.com/office/drawing/2014/main" id="{DB344522-505E-C0E1-5184-D89AA85271E8}"/>
+              </a:ext>
+            </a:extLst>
+          </p:cNvPr>
+          <p:cNvSpPr>
+            <a:spLocks noGrp="1"/>
+          </p:cNvSpPr>
+          <p:nvPr>
+            <p:ph type="sldNum" sz="quarter" idx="12"/>
+          </p:nvPr>
+        </p:nvSpPr>
+        <p:spPr/>
+        <p:txBody>
+          <a:bodyPr/>
+          <a:lstStyle/>
+          <a:p>
+            <a:fld id="{2FD4CC91-F09A-4F5A-BB07-0020C8970CD5}" type="slidenum">
+              <a:rPr lang="sr-Latn-RS" dirty="0" smtClean="0"/>
+              <a:t>4</a:t>
+            </a:fld>
+            <a:r>
+              <a:rPr lang="sr-Latn-RS"/>
+              <a:t>/7</a:t>
+            </a:r>
+            <a:endParaRPr lang="en-US"/>
+          </a:p>
+        </p:txBody>
+      </p:sp>
     </p:spTree>
     <p:extLst>
       <p:ext uri="{BB962C8B-B14F-4D97-AF65-F5344CB8AC3E}">
@@ -5601,6 +5746,39 @@
           </a:p>
         </p:txBody>
       </p:sp>
+      <p:sp>
+        <p:nvSpPr>
+          <p:cNvPr id="4" name="Slide Number Placeholder 3">
+            <a:extLst>
+              <a:ext uri="{FF2B5EF4-FFF2-40B4-BE49-F238E27FC236}">
+                <a16:creationId xmlns:a16="http://schemas.microsoft.com/office/drawing/2014/main" id="{32C996FD-CFCD-9E55-FA28-19CF54269A59}"/>
+              </a:ext>
+            </a:extLst>
+          </p:cNvPr>
+          <p:cNvSpPr>
+            <a:spLocks noGrp="1"/>
+          </p:cNvSpPr>
+          <p:nvPr>
+            <p:ph type="sldNum" sz="quarter" idx="12"/>
+          </p:nvPr>
+        </p:nvSpPr>
+        <p:spPr/>
+        <p:txBody>
+          <a:bodyPr/>
+          <a:lstStyle/>
+          <a:p>
+            <a:fld id="{2FD4CC91-F09A-4F5A-BB07-0020C8970CD5}" type="slidenum">
+              <a:rPr lang="sr-Latn-RS" dirty="0" smtClean="0"/>
+              <a:t>5</a:t>
+            </a:fld>
+            <a:r>
+              <a:rPr lang="sr-Latn-RS"/>
+              <a:t>/7</a:t>
+            </a:r>
+            <a:endParaRPr lang="en-US"/>
+          </a:p>
+        </p:txBody>
+      </p:sp>
     </p:spTree>
     <p:extLst>
       <p:ext uri="{BB962C8B-B14F-4D97-AF65-F5344CB8AC3E}">
@@ -6116,6 +6294,39 @@
           </a:p>
         </p:txBody>
       </p:sp>
+      <p:sp>
+        <p:nvSpPr>
+          <p:cNvPr id="4" name="Slide Number Placeholder 3">
+            <a:extLst>
+              <a:ext uri="{FF2B5EF4-FFF2-40B4-BE49-F238E27FC236}">
+                <a16:creationId xmlns:a16="http://schemas.microsoft.com/office/drawing/2014/main" id="{1A00474A-759F-5C43-7636-3EDAA1EFFD82}"/>
+              </a:ext>
+            </a:extLst>
+          </p:cNvPr>
+          <p:cNvSpPr>
+            <a:spLocks noGrp="1"/>
+          </p:cNvSpPr>
+          <p:nvPr>
+            <p:ph type="sldNum" sz="quarter" idx="12"/>
+          </p:nvPr>
+        </p:nvSpPr>
+        <p:spPr/>
+        <p:txBody>
+          <a:bodyPr/>
+          <a:lstStyle/>
+          <a:p>
+            <a:fld id="{2FD4CC91-F09A-4F5A-BB07-0020C8970CD5}" type="slidenum">
+              <a:rPr lang="sr-Latn-RS" dirty="0" smtClean="0"/>
+              <a:t>6</a:t>
+            </a:fld>
+            <a:r>
+              <a:rPr lang="sr-Latn-RS"/>
+              <a:t>/7</a:t>
+            </a:r>
+            <a:endParaRPr lang="en-US"/>
+          </a:p>
+        </p:txBody>
+      </p:sp>
     </p:spTree>
     <p:extLst>
       <p:ext uri="{BB962C8B-B14F-4D97-AF65-F5344CB8AC3E}">
@@ -6218,6 +6429,39 @@
           </a:prstGeom>
         </p:spPr>
       </p:pic>
+      <p:sp>
+        <p:nvSpPr>
+          <p:cNvPr id="3" name="Slide Number Placeholder 2">
+            <a:extLst>
+              <a:ext uri="{FF2B5EF4-FFF2-40B4-BE49-F238E27FC236}">
+                <a16:creationId xmlns:a16="http://schemas.microsoft.com/office/drawing/2014/main" id="{1E645481-4E88-A605-1DC6-D5DF5F7414BE}"/>
+              </a:ext>
+            </a:extLst>
+          </p:cNvPr>
+          <p:cNvSpPr>
+            <a:spLocks noGrp="1"/>
+          </p:cNvSpPr>
+          <p:nvPr>
+            <p:ph type="sldNum" sz="quarter" idx="12"/>
+          </p:nvPr>
+        </p:nvSpPr>
+        <p:spPr/>
+        <p:txBody>
+          <a:bodyPr/>
+          <a:lstStyle/>
+          <a:p>
+            <a:fld id="{2FD4CC91-F09A-4F5A-BB07-0020C8970CD5}" type="slidenum">
+              <a:rPr lang="sr-Latn-RS" dirty="0" smtClean="0"/>
+              <a:t>7</a:t>
+            </a:fld>
+            <a:r>
+              <a:rPr lang="sr-Latn-RS"/>
+              <a:t>/7</a:t>
+            </a:r>
+            <a:endParaRPr lang="en-US"/>
+          </a:p>
+        </p:txBody>
+      </p:sp>
     </p:spTree>
     <p:extLst>
       <p:ext uri="{BB962C8B-B14F-4D97-AF65-F5344CB8AC3E}">
